--- a/Хахатон.pptx
+++ b/Хахатон.pptx
@@ -5606,15 +5606,14 @@
               <a:t>ИИ-ядро решения: </a:t>
             </a:r>
             <a:r>
-              <a:rPr lang="en-US" sz="1800" i="0" dirty="0" err="1">
+              <a:rPr lang="en-US" dirty="0">
                 <a:solidFill>
                   <a:schemeClr val="bg1"/>
                 </a:solidFill>
-                <a:effectLst/>
                 <a:latin typeface="Arial" panose="020B0604020202020204" pitchFamily="34" charset="0"/>
                 <a:cs typeface="Arial" panose="020B0604020202020204" pitchFamily="34" charset="0"/>
               </a:rPr>
-              <a:t>GigaAM</a:t>
+              <a:t>LLM</a:t>
             </a:r>
             <a:r>
               <a:rPr lang="ru-RU" sz="1800" i="0" dirty="0">
@@ -12484,7 +12483,7 @@
                 </a:solidFill>
                 <a:latin typeface="Arial Black" panose="020B0A04020102020204" pitchFamily="34" charset="0"/>
               </a:rPr>
-              <a:t>Трены</a:t>
+              <a:t>Тренды</a:t>
             </a:r>
             <a:r>
               <a:rPr lang="en-US" sz="3000" dirty="0">
